--- a/Topic_A/Exam_Practice/AT-A-L04_Writing_Workshop_Food_and_Drink_Meals_and_Preferences.pptx
+++ b/Topic_A/Exam_Practice/AT-A-L04_Writing_Workshop_Food_and_Drink_Meals_and_Preferences.pptx
@@ -784,7 +784,11 @@
           <a:lstStyle/>
           <a:p>
             <a:r>
-              <a:rPr lang="en-US" dirty="0"/>
+              <a:rPr lang="ar-SA" dirty="0">
+                <a:latin typeface="Amiri" pitchFamily="2" charset="-78"/>
+                <a:ea typeface="Amiri" pitchFamily="2" charset="-78"/>
+                <a:cs typeface="Amiri" pitchFamily="2" charset="-78"/>
+              </a:rPr>
               <a:t>Q3 (3 min to choose and read). Title (أ) suits Core and Develop; title (ب) suits Stretch.</a:t>
             </a:r>
             <a:endParaRPr lang="en-US" dirty="0"/>
@@ -1403,7 +1407,11 @@
           <a:lstStyle/>
           <a:p>
             <a:r>
-              <a:rPr lang="en-US" dirty="0"/>
+              <a:rPr lang="ar-SA" dirty="0">
+                <a:latin typeface="Amiri" pitchFamily="2" charset="-78"/>
+                <a:ea typeface="Amiri" pitchFamily="2" charset="-78"/>
+                <a:cs typeface="Amiri" pitchFamily="2" charset="-78"/>
+              </a:rPr>
               <a:t>WELCOME (1 min) — while students join.
 • Greet each student by name as they arrive: السَّلَامُ عَلَيْكُمْ. Take the register (Pastoral Tracker: attendance 0/1).
 • 2-MINUTE CHECK-IN (SEND training): a private chat to any student who seemed unsettled last lesson — “Are you okay today? 👍 / 👎”.
@@ -1672,7 +1680,11 @@
           <a:lstStyle/>
           <a:p>
             <a:r>
-              <a:rPr lang="en-US" dirty="0"/>
+              <a:rPr lang="ar-SA" dirty="0">
+                <a:latin typeface="Amiri" pitchFamily="2" charset="-78"/>
+                <a:ea typeface="Amiri" pitchFamily="2" charset="-78"/>
+                <a:cs typeface="Amiri" pitchFamily="2" charset="-78"/>
+              </a:rPr>
               <a:t>QUESTION 1 — FORM FILLING. About 8 minutes. Core: boxes 1–6. Develop / Stretch: all 8. Idāfa answers (عَصِيرُ البُرْتُقَالِ) are good; numbers in box 7 take the plural genitive (ثَلَاثُ وَجَبَاتٍ).</a:t>
             </a:r>
             <a:endParaRPr lang="en-US" dirty="0"/>
@@ -1936,7 +1948,11 @@
           <a:lstStyle/>
           <a:p>
             <a:r>
-              <a:rPr lang="en-US" dirty="0"/>
+              <a:rPr lang="ar-SA" dirty="0">
+                <a:latin typeface="Amiri" pitchFamily="2" charset="-78"/>
+                <a:ea typeface="Amiri" pitchFamily="2" charset="-78"/>
+                <a:cs typeface="Amiri" pitchFamily="2" charset="-78"/>
+              </a:rPr>
               <a:t>Question words: مَاذَا (what) · مَا (what) · لِمَاذَا (why) — and the tenses in bullet 4: أَكَلْتَ (past) · تُرِيدُ أَنْ تُجَرِّبَ (a wish).</a:t>
             </a:r>
             <a:endParaRPr lang="en-US" dirty="0"/>
@@ -2508,6 +2524,7 @@
                   <a:srgbClr val="D4AF37"/>
                 </a:solidFill>
                 <a:latin typeface="Amiri" pitchFamily="2" charset="-78"/>
+                <a:ea typeface="Amiri" pitchFamily="2" charset="-78"/>
                 <a:cs typeface="Amiri" pitchFamily="2" charset="-78"/>
               </a:rPr>
               <a:t>م</a:t>
@@ -2714,6 +2731,7 @@
                   <a:srgbClr val="D4AF37"/>
                 </a:solidFill>
                 <a:latin typeface="Amiri" pitchFamily="2" charset="-78"/>
+                <a:ea typeface="Amiri" pitchFamily="2" charset="-78"/>
                 <a:cs typeface="Amiri" pitchFamily="2" charset="-78"/>
               </a:rPr>
               <a:t>وَرْشَةُ الكِتَابَةِ — الطَّعَامُ وَالشَّرَابُ</a:t>
@@ -3171,6 +3189,7 @@
                   <a:srgbClr val="D4AF37"/>
                 </a:solidFill>
                 <a:latin typeface="Amiri" pitchFamily="2" charset="-78"/>
+                <a:ea typeface="Amiri" pitchFamily="2" charset="-78"/>
                 <a:cs typeface="Amiri" pitchFamily="2" charset="-78"/>
               </a:rPr>
               <a:t>م</a:t>
@@ -3491,6 +3510,7 @@
                   <a:srgbClr val="8A6D1E"/>
                 </a:solidFill>
                 <a:latin typeface="Amiri" pitchFamily="2" charset="-78"/>
+                <a:ea typeface="Amiri" pitchFamily="2" charset="-78"/>
                 <a:cs typeface="Amiri" pitchFamily="2" charset="-78"/>
               </a:rPr>
               <a:t>نَمُوذَجُ الإِجَابَةِ</a:t>
@@ -3604,6 +3624,7 @@
                   <a:srgbClr val="1F2A37"/>
                 </a:solidFill>
                 <a:latin typeface="Amiri" pitchFamily="2" charset="-78"/>
+                <a:ea typeface="Amiri" pitchFamily="2" charset="-78"/>
                 <a:cs typeface="Amiri" pitchFamily="2" charset="-78"/>
               </a:rPr>
               <a:t>مَرْحَبًا يَا سَلْمَى،</a:t>
@@ -3623,6 +3644,7 @@
                   <a:srgbClr val="1F2A37"/>
                 </a:solidFill>
                 <a:latin typeface="Amiri" pitchFamily="2" charset="-78"/>
+                <a:ea typeface="Amiri" pitchFamily="2" charset="-78"/>
                 <a:cs typeface="Amiri" pitchFamily="2" charset="-78"/>
               </a:rPr>
               <a:t>أَنَا مَرْيَمُ، وَسَأَزُورُكُمْ قَرِيبًا. فِي الفُطُورِ آكُلُ الخُبْزَ وَالجُبْنَ وَأَشْرَبُ الحَلِيبَ، وَفِي الغَدَاءِ آكُلُ شَطِيرَةً فِي المَدْرَسَةِ، وَفِي العَشَاءِ آكُلُ الأُرْزَ مَعَ أُسْرَتِي. طَبَقِي المُفَضَّلُ هُوَ الدَّجَاجُ بِالأُرْزِ لِأَنَّهُ لَذِيذٌ جِدًّا. لَا آكُلُ السَّمَكَ، وَلَا آكُلُ إِلَّا اللَّحْمَ الحَلَالَ. أَمْسِ أَكَلْتُ البِيتْزَا مَعَ صَدِيقَاتِي فِي المَطْعَمِ. فِي الأُرْدُنِّ أُرِيدُ أَنْ آكُلَ المَنْسَفَ.</a:t>
@@ -3642,6 +3664,7 @@
                   <a:srgbClr val="1F2A37"/>
                 </a:solidFill>
                 <a:latin typeface="Amiri" pitchFamily="2" charset="-78"/>
+                <a:ea typeface="Amiri" pitchFamily="2" charset="-78"/>
                 <a:cs typeface="Amiri" pitchFamily="2" charset="-78"/>
               </a:rPr>
               <a:t>مَعَ السَّلَامَةِ،</a:t>
@@ -3661,6 +3684,7 @@
                   <a:srgbClr val="1F2A37"/>
                 </a:solidFill>
                 <a:latin typeface="Amiri" pitchFamily="2" charset="-78"/>
+                <a:ea typeface="Amiri" pitchFamily="2" charset="-78"/>
                 <a:cs typeface="Amiri" pitchFamily="2" charset="-78"/>
               </a:rPr>
               <a:t>مَرْيَمُ</a:t>
@@ -3824,11 +3848,12 @@
               <a:buNone/>
             </a:pPr>
             <a:r>
-              <a:rPr lang="en-US" sz="950" b="1" dirty="0">
+              <a:rPr lang="ar-SA" sz="950" b="1" dirty="0">
                 <a:solidFill>
                   <a:srgbClr val="FFFFFF"/>
                 </a:solidFill>
                 <a:latin typeface="Calibri" pitchFamily="34" charset="0"/>
+                <a:ea typeface="Amiri" pitchFamily="2" charset="-78"/>
                 <a:cs typeface="Amiri" pitchFamily="2" charset="-78"/>
               </a:rPr>
               <a:t>فِي الفُطُورِ</a:t>
@@ -3889,11 +3914,12 @@
               <a:buNone/>
             </a:pPr>
             <a:r>
-              <a:rPr lang="en-US" sz="950" b="1" dirty="0">
+              <a:rPr lang="ar-SA" sz="950" b="1" dirty="0">
                 <a:solidFill>
                   <a:srgbClr val="FFFFFF"/>
                 </a:solidFill>
                 <a:latin typeface="Calibri" pitchFamily="34" charset="0"/>
+                <a:ea typeface="Amiri" pitchFamily="2" charset="-78"/>
                 <a:cs typeface="Amiri" pitchFamily="2" charset="-78"/>
               </a:rPr>
               <a:t>لِأَنَّهُ لَذِيذٌ</a:t>
@@ -3954,11 +3980,12 @@
               <a:buNone/>
             </a:pPr>
             <a:r>
-              <a:rPr lang="en-US" sz="950" b="1" dirty="0">
+              <a:rPr lang="ar-SA" sz="950" b="1" dirty="0">
                 <a:solidFill>
                   <a:srgbClr val="FFFFFF"/>
                 </a:solidFill>
                 <a:latin typeface="Calibri" pitchFamily="34" charset="0"/>
+                <a:ea typeface="Amiri" pitchFamily="2" charset="-78"/>
                 <a:cs typeface="Amiri" pitchFamily="2" charset="-78"/>
               </a:rPr>
               <a:t>لَا آكُلُ</a:t>
@@ -4019,11 +4046,12 @@
               <a:buNone/>
             </a:pPr>
             <a:r>
-              <a:rPr lang="en-US" sz="950" b="1" dirty="0">
+              <a:rPr lang="ar-SA" sz="950" b="1" dirty="0">
                 <a:solidFill>
                   <a:srgbClr val="FFFFFF"/>
                 </a:solidFill>
                 <a:latin typeface="Calibri" pitchFamily="34" charset="0"/>
+                <a:ea typeface="Amiri" pitchFamily="2" charset="-78"/>
                 <a:cs typeface="Amiri" pitchFamily="2" charset="-78"/>
               </a:rPr>
               <a:t>أُرِيدُ أَنْ آكُلَ</a:t>
@@ -4157,6 +4185,7 @@
                   <a:srgbClr val="D4AF37"/>
                 </a:solidFill>
                 <a:latin typeface="Amiri" pitchFamily="2" charset="-78"/>
+                <a:ea typeface="Amiri" pitchFamily="2" charset="-78"/>
                 <a:cs typeface="Amiri" pitchFamily="2" charset="-78"/>
               </a:rPr>
               <a:t>م</a:t>
@@ -4477,6 +4506,7 @@
                   <a:srgbClr val="8A6D1E"/>
                 </a:solidFill>
                 <a:latin typeface="Amiri" pitchFamily="2" charset="-78"/>
+                <a:ea typeface="Amiri" pitchFamily="2" charset="-78"/>
                 <a:cs typeface="Amiri" pitchFamily="2" charset="-78"/>
               </a:rPr>
               <a:t>نَمُوذَجُ الإِجَابَةِ</a:t>
@@ -4590,6 +4620,7 @@
                   <a:srgbClr val="1F2A37"/>
                 </a:solidFill>
                 <a:latin typeface="Amiri" pitchFamily="2" charset="-78"/>
+                <a:ea typeface="Amiri" pitchFamily="2" charset="-78"/>
                 <a:cs typeface="Amiri" pitchFamily="2" charset="-78"/>
               </a:rPr>
               <a:t>مَرْحَبًا يَا سَلْمَى،</a:t>
@@ -4609,6 +4640,7 @@
                   <a:srgbClr val="1F2A37"/>
                 </a:solidFill>
                 <a:latin typeface="Amiri" pitchFamily="2" charset="-78"/>
+                <a:ea typeface="Amiri" pitchFamily="2" charset="-78"/>
                 <a:cs typeface="Amiri" pitchFamily="2" charset="-78"/>
               </a:rPr>
               <a:t>كَيْفَ حَالُكِ؟ أَنَا سَعِيدَةٌ جِدًّا لِأَنِّي سَأَزُورُكُمْ قَرِيبًا. فِي الفُطُورِ آكُلُ الخُبْزَ وَالجُبْنَ عَادَةً وَأَشْرَبُ الشَّايَ بِالحَلِيبِ، وَفِي الغَدَاءِ آكُلُ شَطِيرَةً فِي المَدْرَسَةِ، أَمَّا العَشَاءُ فَأَتَنَاوَلُهُ مَعَ أُسْرَتِي فِي السَّابِعَةِ. طَبَقِي المُفَضَّلُ هُوَ الدَّجَاجُ بِالأُرْزِ، لِأَنَّ أُمِّي تَطْبُخُهُ بِبَهَارَاتٍ لَذِيذَةٍ. لَا آكُلُ السَّمَكَ لِأَنَّ عِنْدِي حَسَاسِيَّةً مِنْهُ، وَلَا آكُلُ إِلَّا اللَّحْمَ الحَلَالَ. أَمْسِ أَكَلْتُ البِيتْزَا مَعَ صَدِيقَاتِي فِي مَطْعَمٍ إِيطَالِيٍّ قَرِيبٍ بِمُنَاسَبَةِ عِيدِ مِيلَادِ إِحْدَاهُنَّ. فِي الأُرْدُنِّ أُرِيدُ أَنْ أُجَرِّبَ المَنْسَفَ، لِأَنِّي سَمِعْتُ أَنَّهُ لَذِيذٌ جِدًّا. وَأَنْتِ، مَا طَبَقُكِ المُفَضَّلُ؟</a:t>
@@ -4628,6 +4660,7 @@
                   <a:srgbClr val="1F2A37"/>
                 </a:solidFill>
                 <a:latin typeface="Amiri" pitchFamily="2" charset="-78"/>
+                <a:ea typeface="Amiri" pitchFamily="2" charset="-78"/>
                 <a:cs typeface="Amiri" pitchFamily="2" charset="-78"/>
               </a:rPr>
               <a:t>مَعَ تَحِيَّاتِي،</a:t>
@@ -4647,6 +4680,7 @@
                   <a:srgbClr val="1F2A37"/>
                 </a:solidFill>
                 <a:latin typeface="Amiri" pitchFamily="2" charset="-78"/>
+                <a:ea typeface="Amiri" pitchFamily="2" charset="-78"/>
                 <a:cs typeface="Amiri" pitchFamily="2" charset="-78"/>
               </a:rPr>
               <a:t>مَرْيَمُ</a:t>
@@ -4810,11 +4844,12 @@
               <a:buNone/>
             </a:pPr>
             <a:r>
-              <a:rPr lang="en-US" sz="950" b="1" dirty="0">
+              <a:rPr lang="ar-SA" sz="950" b="1" dirty="0">
                 <a:solidFill>
                   <a:srgbClr val="FFFFFF"/>
                 </a:solidFill>
                 <a:latin typeface="Calibri" pitchFamily="34" charset="0"/>
+                <a:ea typeface="Amiri" pitchFamily="2" charset="-78"/>
                 <a:cs typeface="Amiri" pitchFamily="2" charset="-78"/>
               </a:rPr>
               <a:t>أَمَّا العَشَاءُ فَأَتَنَاوَلُهُ</a:t>
@@ -4875,11 +4910,12 @@
               <a:buNone/>
             </a:pPr>
             <a:r>
-              <a:rPr lang="en-US" sz="950" b="1" dirty="0">
+              <a:rPr lang="ar-SA" sz="950" b="1" dirty="0">
                 <a:solidFill>
                   <a:srgbClr val="FFFFFF"/>
                 </a:solidFill>
                 <a:latin typeface="Calibri" pitchFamily="34" charset="0"/>
+                <a:ea typeface="Amiri" pitchFamily="2" charset="-78"/>
                 <a:cs typeface="Amiri" pitchFamily="2" charset="-78"/>
               </a:rPr>
               <a:t>بِبَهَارَاتٍ لَذِيذَةٍ</a:t>
@@ -4940,11 +4976,12 @@
               <a:buNone/>
             </a:pPr>
             <a:r>
-              <a:rPr lang="en-US" sz="950" b="1" dirty="0">
+              <a:rPr lang="ar-SA" sz="950" b="1" dirty="0">
                 <a:solidFill>
                   <a:srgbClr val="FFFFFF"/>
                 </a:solidFill>
                 <a:latin typeface="Calibri" pitchFamily="34" charset="0"/>
+                <a:ea typeface="Amiri" pitchFamily="2" charset="-78"/>
                 <a:cs typeface="Amiri" pitchFamily="2" charset="-78"/>
               </a:rPr>
               <a:t>لِأَنَّ عِنْدِي حَسَاسِيَّةً</a:t>
@@ -5005,11 +5042,12 @@
               <a:buNone/>
             </a:pPr>
             <a:r>
-              <a:rPr lang="en-US" sz="950" b="1" dirty="0">
+              <a:rPr lang="ar-SA" sz="950" b="1" dirty="0">
                 <a:solidFill>
                   <a:srgbClr val="FFFFFF"/>
                 </a:solidFill>
                 <a:latin typeface="Calibri" pitchFamily="34" charset="0"/>
+                <a:ea typeface="Amiri" pitchFamily="2" charset="-78"/>
                 <a:cs typeface="Amiri" pitchFamily="2" charset="-78"/>
               </a:rPr>
               <a:t>أُرِيدُ أَنْ أُجَرِّبَ</a:t>
@@ -5143,6 +5181,7 @@
                   <a:srgbClr val="D4AF37"/>
                 </a:solidFill>
                 <a:latin typeface="Amiri" pitchFamily="2" charset="-78"/>
+                <a:ea typeface="Amiri" pitchFamily="2" charset="-78"/>
                 <a:cs typeface="Amiri" pitchFamily="2" charset="-78"/>
               </a:rPr>
               <a:t>م</a:t>
@@ -5463,6 +5502,7 @@
                   <a:srgbClr val="8A6D1E"/>
                 </a:solidFill>
                 <a:latin typeface="Amiri" pitchFamily="2" charset="-78"/>
+                <a:ea typeface="Amiri" pitchFamily="2" charset="-78"/>
                 <a:cs typeface="Amiri" pitchFamily="2" charset="-78"/>
               </a:rPr>
               <a:t>اخْتَرْ عُنْوَانًا وَاحِدًا</a:t>
@@ -5743,6 +5783,7 @@
                   <a:srgbClr val="1B3B6F"/>
                 </a:solidFill>
                 <a:latin typeface="Amiri" pitchFamily="2" charset="-78"/>
+                <a:ea typeface="Amiri" pitchFamily="2" charset="-78"/>
                 <a:cs typeface="Amiri" pitchFamily="2" charset="-78"/>
               </a:rPr>
               <a:t>طَعَامِي وَعَادَاتِي فِي الأَكْلِ</a:t>
@@ -5781,6 +5822,7 @@
                   <a:srgbClr val="1B3B6F"/>
                 </a:solidFill>
                 <a:latin typeface="Amiri" pitchFamily="2" charset="-78"/>
+                <a:ea typeface="Amiri" pitchFamily="2" charset="-78"/>
                 <a:cs typeface="Amiri" pitchFamily="2" charset="-78"/>
               </a:rPr>
               <a:t>(أ)</a:t>
@@ -5887,6 +5929,7 @@
                   <a:srgbClr val="1B3B6F"/>
                 </a:solidFill>
                 <a:latin typeface="Amiri" pitchFamily="2" charset="-78"/>
+                <a:ea typeface="Amiri" pitchFamily="2" charset="-78"/>
                 <a:cs typeface="Amiri" pitchFamily="2" charset="-78"/>
               </a:rPr>
               <a:t>صِفْ وَجَبَاتِكَ اليَوْمِيَّةَ · مَا الطَّعَامُ الَّذِي تُحِبُّهُ وَالَّذِي لَا تُحِبُّهُ؟ وَلِمَاذَا؟ · صِفْ وَجْبَةً خَاصَّةً أَكَلْتَهَا مُؤَخَّرًا · مَاذَا سَتُغَيِّرُ فِي عَادَاتِكَ؟</a:t>
@@ -6018,6 +6061,7 @@
                   <a:srgbClr val="1B3B6F"/>
                 </a:solidFill>
                 <a:latin typeface="Amiri" pitchFamily="2" charset="-78"/>
+                <a:ea typeface="Amiri" pitchFamily="2" charset="-78"/>
                 <a:cs typeface="Amiri" pitchFamily="2" charset="-78"/>
               </a:rPr>
               <a:t>الطَّعَامُ التَّقْلِيدِيُّ وَالوَجَبَاتُ السَّرِيعَةُ</a:t>
@@ -6056,6 +6100,7 @@
                   <a:srgbClr val="1B3B6F"/>
                 </a:solidFill>
                 <a:latin typeface="Amiri" pitchFamily="2" charset="-78"/>
+                <a:ea typeface="Amiri" pitchFamily="2" charset="-78"/>
                 <a:cs typeface="Amiri" pitchFamily="2" charset="-78"/>
               </a:rPr>
               <a:t>(ب)</a:t>
@@ -6162,6 +6207,7 @@
                   <a:srgbClr val="1B3B6F"/>
                 </a:solidFill>
                 <a:latin typeface="Amiri" pitchFamily="2" charset="-78"/>
+                <a:ea typeface="Amiri" pitchFamily="2" charset="-78"/>
                 <a:cs typeface="Amiri" pitchFamily="2" charset="-78"/>
               </a:rPr>
               <a:t>كَيْفَ تَغَيَّرَتْ عَادَاتُ الأَكْلِ؟ · مَا مَزَايَا الوَجَبَاتِ السَّرِيعَةِ وَعُيُوبُهَا؟ · صِفْ تَجْرِبَةً مَعَ طَعَامٍ تَقْلِيدِيٍّ · مَا رَأْيُكَ؟ وَمَاذَا تَقْتَرِحُ؟</a:t>
@@ -6361,6 +6407,7 @@
                   <a:srgbClr val="D4AF37"/>
                 </a:solidFill>
                 <a:latin typeface="Amiri" pitchFamily="2" charset="-78"/>
+                <a:ea typeface="Amiri" pitchFamily="2" charset="-78"/>
                 <a:cs typeface="Amiri" pitchFamily="2" charset="-78"/>
               </a:rPr>
               <a:t>م</a:t>
@@ -6681,6 +6728,7 @@
                   <a:srgbClr val="8A6D1E"/>
                 </a:solidFill>
                 <a:latin typeface="Amiri" pitchFamily="2" charset="-78"/>
+                <a:ea typeface="Amiri" pitchFamily="2" charset="-78"/>
                 <a:cs typeface="Amiri" pitchFamily="2" charset="-78"/>
               </a:rPr>
               <a:t>خُطَّةُ الكِتَابَةِ</a:t>
@@ -7305,6 +7353,7 @@
                   <a:srgbClr val="1B3B6F"/>
                 </a:solidFill>
                 <a:latin typeface="Amiri" pitchFamily="2" charset="-78"/>
+                <a:ea typeface="Amiri" pitchFamily="2" charset="-78"/>
                 <a:cs typeface="Amiri" pitchFamily="2" charset="-78"/>
               </a:rPr>
               <a:t>فِي الفُطُورِ آكُلُ البَيْضَ وَالخُبْزَ.</a:t>
@@ -7404,6 +7453,7 @@
                   <a:srgbClr val="1B3B6F"/>
                 </a:solidFill>
                 <a:latin typeface="Amiri" pitchFamily="2" charset="-78"/>
+                <a:ea typeface="Amiri" pitchFamily="2" charset="-78"/>
                 <a:cs typeface="Amiri" pitchFamily="2" charset="-78"/>
               </a:rPr>
               <a:t>أَمْسِ أَكَلْنَا فِي مَطْعَمٍ تُرْكِيٍّ.</a:t>
@@ -7503,6 +7553,7 @@
                   <a:srgbClr val="1B3B6F"/>
                 </a:solidFill>
                 <a:latin typeface="Amiri" pitchFamily="2" charset="-78"/>
+                <a:ea typeface="Amiri" pitchFamily="2" charset="-78"/>
                 <a:cs typeface="Amiri" pitchFamily="2" charset="-78"/>
               </a:rPr>
               <a:t>سَأَتَعَلَّمُ الطَّبْخَ مَعَ أُمِّي.</a:t>
@@ -7664,6 +7715,7 @@
                   <a:srgbClr val="1F2A37"/>
                 </a:solidFill>
                 <a:latin typeface="Amiri" pitchFamily="2" charset="-78"/>
+                <a:ea typeface="Amiri" pitchFamily="2" charset="-78"/>
                 <a:cs typeface="Amiri" pitchFamily="2" charset="-78"/>
               </a:rPr>
               <a:t>أ</a:t>
@@ -7690,6 +7742,7 @@
                   <a:srgbClr val="1F2A37"/>
                 </a:solidFill>
                 <a:latin typeface="Amiri" pitchFamily="2" charset="-78"/>
+                <a:ea typeface="Amiri" pitchFamily="2" charset="-78"/>
                 <a:cs typeface="Amiri" pitchFamily="2" charset="-78"/>
               </a:rPr>
               <a:t>ب</a:t>
@@ -7836,6 +7889,7 @@
                   <a:srgbClr val="D4AF37"/>
                 </a:solidFill>
                 <a:latin typeface="Amiri" pitchFamily="2" charset="-78"/>
+                <a:ea typeface="Amiri" pitchFamily="2" charset="-78"/>
                 <a:cs typeface="Amiri" pitchFamily="2" charset="-78"/>
               </a:rPr>
               <a:t>م</a:t>
@@ -8093,6 +8147,7 @@
                   <a:srgbClr val="8A6D1E"/>
                 </a:solidFill>
                 <a:latin typeface="Amiri" pitchFamily="2" charset="-78"/>
+                <a:ea typeface="Amiri" pitchFamily="2" charset="-78"/>
                 <a:cs typeface="Amiri" pitchFamily="2" charset="-78"/>
               </a:rPr>
               <a:t>أ</a:t>
@@ -8157,6 +8212,7 @@
                   <a:srgbClr val="1B3B6F"/>
                 </a:solidFill>
                 <a:latin typeface="Amiri" pitchFamily="2" charset="-78"/>
+                <a:ea typeface="Amiri" pitchFamily="2" charset="-78"/>
                 <a:cs typeface="Amiri" pitchFamily="2" charset="-78"/>
               </a:rPr>
               <a:t>أ</a:t>
@@ -8208,6 +8264,7 @@
                   <a:srgbClr val="8A6D1E"/>
                 </a:solidFill>
                 <a:latin typeface="Amiri" pitchFamily="2" charset="-78"/>
+                <a:ea typeface="Amiri" pitchFamily="2" charset="-78"/>
                 <a:cs typeface="Amiri" pitchFamily="2" charset="-78"/>
               </a:rPr>
               <a:t>نَمُوذَجُ الإِجَابَةِ</a:t>
@@ -8321,6 +8378,7 @@
                   <a:srgbClr val="1F2A37"/>
                 </a:solidFill>
                 <a:latin typeface="Amiri" pitchFamily="2" charset="-78"/>
+                <a:ea typeface="Amiri" pitchFamily="2" charset="-78"/>
                 <a:cs typeface="Amiri" pitchFamily="2" charset="-78"/>
               </a:rPr>
               <a:t>أَتَنَاوَلُ ثَلَاثَ وَجَبَاتٍ كُلَّ يَوْمٍ. فِي الفُطُورِ آكُلُ البَيْضَ وَالخُبْزَ، وَأَشْرَبُ الحَلِيبَ. فِي الغَدَاءِ آكُلُ فِي مَقْصَفِ المَدْرَسَةِ، وَعَادَةً آكُلُ شَطِيرَةً وَتُفَّاحَةً، وَأَشْرَبُ عَصِيرَ التُّفَّاحِ. فِي العَشَاءِ آكُلُ مَعَ أُسْرَتِي فِي البَيْتِ. تَطْبُخُ أُمِّي الأُرْزَ وَالدَّجَاجَ وَالخُضَارَ، وَالطَّعَامُ دَائِمًا لَذِيذٌ.</a:t>
@@ -8340,6 +8398,7 @@
                   <a:srgbClr val="1F2A37"/>
                 </a:solidFill>
                 <a:latin typeface="Amiri" pitchFamily="2" charset="-78"/>
+                <a:ea typeface="Amiri" pitchFamily="2" charset="-78"/>
                 <a:cs typeface="Amiri" pitchFamily="2" charset="-78"/>
               </a:rPr>
               <a:t>طَعَامِي المُفَضَّلُ هُوَ البِرْيَانِي، لِأَنَّهُ حَارٌّ قَلِيلًا وَلَذِيذٌ. لَا أُحِبُّ السَّمَكَ، لِأَنَّ رَائِحَتَهُ قَوِيَّةٌ. أَشْرَبُ المَاءَ كَثِيرًا، وَلَا أَشْرَبُ المَشْرُوبَاتِ الغَازِيَّةَ. وَأُحِبُّ الفَوَاكِهَ كَثِيرًا، خَاصَّةً المَانْجُو وَالمَوْزَ.</a:t>
@@ -8359,6 +8418,7 @@
                   <a:srgbClr val="1F2A37"/>
                 </a:solidFill>
                 <a:latin typeface="Amiri" pitchFamily="2" charset="-78"/>
+                <a:ea typeface="Amiri" pitchFamily="2" charset="-78"/>
                 <a:cs typeface="Amiri" pitchFamily="2" charset="-78"/>
               </a:rPr>
               <a:t>يَوْمَ السَّبْتِ المَاضِي ذَهَبْنَا إِلَى مَطْعَمٍ تُرْكِيٍّ مَعَ أُسْرَتِي. أَكَلْتُ الكَبَابَ وَالأُرْزَ، وَشَرِبْتُ عَصِيرَ البُرْتُقَالِ. ثُمَّ أَكَلْنَا البَقْلَاوَةَ مَعَ الشَّايِ. كَانَ الطَّعَامُ لَذِيذًا جِدًّا.</a:t>
@@ -8378,6 +8438,7 @@
                   <a:srgbClr val="1F2A37"/>
                 </a:solidFill>
                 <a:latin typeface="Amiri" pitchFamily="2" charset="-78"/>
+                <a:ea typeface="Amiri" pitchFamily="2" charset="-78"/>
                 <a:cs typeface="Amiri" pitchFamily="2" charset="-78"/>
               </a:rPr>
               <a:t>فِي المُسْتَقْبَلِ سَأَتَعَلَّمُ الطَّبْخَ مَعَ أُمِّي، وَسَأَطْبُخُ البِرْيَانِي لِأُسْرَتِي، وَسَآكُلُ الفَوَاكِهَ كُلَّ يَوْمٍ. أَعْتَقِدُ أَنَّ الطَّعَامَ الصِّحِّيَّ مُهِمٌّ لِكُلِّ النَّاسِ.</a:t>
@@ -8541,11 +8602,12 @@
               <a:buNone/>
             </a:pPr>
             <a:r>
-              <a:rPr lang="en-US" sz="950" b="1" dirty="0">
+              <a:rPr lang="ar-SA" sz="950" b="1" dirty="0">
                 <a:solidFill>
                   <a:srgbClr val="FFFFFF"/>
                 </a:solidFill>
                 <a:latin typeface="Calibri" pitchFamily="34" charset="0"/>
+                <a:ea typeface="Amiri" pitchFamily="2" charset="-78"/>
                 <a:cs typeface="Amiri" pitchFamily="2" charset="-78"/>
               </a:rPr>
               <a:t>ثَلَاثَ وَجَبَاتٍ</a:t>
@@ -8606,11 +8668,12 @@
               <a:buNone/>
             </a:pPr>
             <a:r>
-              <a:rPr lang="en-US" sz="950" b="1" dirty="0">
+              <a:rPr lang="ar-SA" sz="950" b="1" dirty="0">
                 <a:solidFill>
                   <a:srgbClr val="FFFFFF"/>
                 </a:solidFill>
                 <a:latin typeface="Calibri" pitchFamily="34" charset="0"/>
+                <a:ea typeface="Amiri" pitchFamily="2" charset="-78"/>
                 <a:cs typeface="Amiri" pitchFamily="2" charset="-78"/>
               </a:rPr>
               <a:t>لِأَنَّهُ حَارٌّ</a:t>
@@ -8671,11 +8734,12 @@
               <a:buNone/>
             </a:pPr>
             <a:r>
-              <a:rPr lang="en-US" sz="950" b="1" dirty="0">
+              <a:rPr lang="ar-SA" sz="950" b="1" dirty="0">
                 <a:solidFill>
                   <a:srgbClr val="FFFFFF"/>
                 </a:solidFill>
                 <a:latin typeface="Calibri" pitchFamily="34" charset="0"/>
+                <a:ea typeface="Amiri" pitchFamily="2" charset="-78"/>
                 <a:cs typeface="Amiri" pitchFamily="2" charset="-78"/>
               </a:rPr>
               <a:t>ذَهَبْنَا إِلَى مَطْعَمٍ</a:t>
@@ -8736,11 +8800,12 @@
               <a:buNone/>
             </a:pPr>
             <a:r>
-              <a:rPr lang="en-US" sz="950" b="1" dirty="0">
+              <a:rPr lang="ar-SA" sz="950" b="1" dirty="0">
                 <a:solidFill>
                   <a:srgbClr val="FFFFFF"/>
                 </a:solidFill>
                 <a:latin typeface="Calibri" pitchFamily="34" charset="0"/>
+                <a:ea typeface="Amiri" pitchFamily="2" charset="-78"/>
                 <a:cs typeface="Amiri" pitchFamily="2" charset="-78"/>
               </a:rPr>
               <a:t>سَأَتَعَلَّمُ</a:t>
@@ -8874,6 +8939,7 @@
                   <a:srgbClr val="D4AF37"/>
                 </a:solidFill>
                 <a:latin typeface="Amiri" pitchFamily="2" charset="-78"/>
+                <a:ea typeface="Amiri" pitchFamily="2" charset="-78"/>
                 <a:cs typeface="Amiri" pitchFamily="2" charset="-78"/>
               </a:rPr>
               <a:t>م</a:t>
@@ -9131,6 +9197,7 @@
                   <a:srgbClr val="8A6D1E"/>
                 </a:solidFill>
                 <a:latin typeface="Amiri" pitchFamily="2" charset="-78"/>
+                <a:ea typeface="Amiri" pitchFamily="2" charset="-78"/>
                 <a:cs typeface="Amiri" pitchFamily="2" charset="-78"/>
               </a:rPr>
               <a:t>أ</a:t>
@@ -9195,6 +9262,7 @@
                   <a:srgbClr val="1B3B6F"/>
                 </a:solidFill>
                 <a:latin typeface="Amiri" pitchFamily="2" charset="-78"/>
+                <a:ea typeface="Amiri" pitchFamily="2" charset="-78"/>
                 <a:cs typeface="Amiri" pitchFamily="2" charset="-78"/>
               </a:rPr>
               <a:t>أ</a:t>
@@ -9246,6 +9314,7 @@
                   <a:srgbClr val="8A6D1E"/>
                 </a:solidFill>
                 <a:latin typeface="Amiri" pitchFamily="2" charset="-78"/>
+                <a:ea typeface="Amiri" pitchFamily="2" charset="-78"/>
                 <a:cs typeface="Amiri" pitchFamily="2" charset="-78"/>
               </a:rPr>
               <a:t>نَمُوذَجُ الإِجَابَةِ</a:t>
@@ -9359,6 +9428,7 @@
                   <a:srgbClr val="1F2A37"/>
                 </a:solidFill>
                 <a:latin typeface="Amiri" pitchFamily="2" charset="-78"/>
+                <a:ea typeface="Amiri" pitchFamily="2" charset="-78"/>
                 <a:cs typeface="Amiri" pitchFamily="2" charset="-78"/>
               </a:rPr>
               <a:t>أَتَنَاوَلُ ثَلَاثَ وَجَبَاتٍ يَوْمِيًّا، وَأَحْرِصُ عَلَى أَلَّا أَتْرُكَ الفُطُورَ، لِأَنَّهُ يُعْطِينِي الطَّاقَةَ لِلدِّرَاسَةِ، وَأَشْرَبُ مَعَهُ كُوبًا مِنَ الحَلِيبِ. فِي الغَدَاءِ آكُلُ فِي مَقْصَفِ المَدْرَسَةِ، أَمَّا العَشَاءُ فَهُوَ أَهَمُّ وَجْبَةٍ فِي بَيْتِنَا، إِذْ نَجْتَمِعُ حَوْلَ المَائِدَةِ وَنَتَحَدَّثُ عَنْ يَوْمِنَا.</a:t>
@@ -9378,6 +9448,7 @@
                   <a:srgbClr val="1F2A37"/>
                 </a:solidFill>
                 <a:latin typeface="Amiri" pitchFamily="2" charset="-78"/>
+                <a:ea typeface="Amiri" pitchFamily="2" charset="-78"/>
                 <a:cs typeface="Amiri" pitchFamily="2" charset="-78"/>
               </a:rPr>
               <a:t>أُفَضِّلُ الأَطْبَاقَ البَيْتِيَّةَ عَلَى الوَجَبَاتِ السَّرِيعَةِ، فَطَبَقِي المُفَضَّلُ هُوَ البِرْيَانِي الَّذِي تَطْبُخُهُ أُمِّي بِبَهَارَاتٍ حَارَّةٍ وَلَذِيذَةٍ، وَتُقَدِّمُهُ مَعَ اللَّبَنِ وَالسَّلَطَةِ. صَحِيحٌ أَنَّ البِيتْزَا سَرِيعَةٌ وَشَهِيَّةٌ، غَيْرَ أَنَّهَا لَيْسَتْ صِحِّيَّةً إِذَا أَكَلْنَاهَا كَثِيرًا.</a:t>
@@ -9397,6 +9468,7 @@
                   <a:srgbClr val="1F2A37"/>
                 </a:solidFill>
                 <a:latin typeface="Amiri" pitchFamily="2" charset="-78"/>
+                <a:ea typeface="Amiri" pitchFamily="2" charset="-78"/>
                 <a:cs typeface="Amiri" pitchFamily="2" charset="-78"/>
               </a:rPr>
               <a:t>فِي نِهَايَةِ الأُسْبُوعِ المَاضِي احْتَفَلْنَا بِعِيدِ مِيلَادِ أَبِي فِي مَطْعَمٍ تُرْكِيٍّ؛ طَلَبْنَا أَطْبَاقًا مُتَنَوِّعَةً، وَأَكَلْتُ الكَبَابَ لِأَوَّلِ مَرَّةٍ، ثُمَّ تَنَاوَلْنَا حَلْوَى البَقْلَاوَةِ مَعَ الشَّايِ. كَانَتْ أُمْسِيَةً رَائِعَةً، فَالطَّعَامُ لَذِيذٌ وَالخِدْمَةُ مُمْتَازَةٌ.</a:t>
@@ -9416,6 +9488,7 @@
                   <a:srgbClr val="1F2A37"/>
                 </a:solidFill>
                 <a:latin typeface="Amiri" pitchFamily="2" charset="-78"/>
+                <a:ea typeface="Amiri" pitchFamily="2" charset="-78"/>
                 <a:cs typeface="Amiri" pitchFamily="2" charset="-78"/>
               </a:rPr>
               <a:t>فِي المُسْتَقْبَلِ سَأَتَعَلَّمُ طَبْخَ الأَطْبَاقِ التَّقْلِيدِيَّةِ مِنْ جَدَّتِي، لِكَيْ أُحَافِظَ عَلَى وَصَفَاتِ أُسْرَتِنَا. وَلَوْ كَانَ عِنْدِي وَقْتٌ أَكْثَرُ، لَطَبَخْتُ العَشَاءَ لِأُسْرَتِي مَرَّةً فِي الأُسْبُوعِ عَلَى الأَقَلِّ، لِأَنَّ ذٰلِكَ يُسْعِدُ أُمِّي.</a:t>
@@ -9514,11 +9587,12 @@
               <a:buNone/>
             </a:pPr>
             <a:r>
-              <a:rPr lang="en-US" sz="950" b="1" dirty="0">
+              <a:rPr lang="ar-SA" sz="950" b="1" dirty="0">
                 <a:solidFill>
                   <a:srgbClr val="FFFFFF"/>
                 </a:solidFill>
                 <a:latin typeface="Calibri" pitchFamily="34" charset="0"/>
+                <a:ea typeface="Amiri" pitchFamily="2" charset="-78"/>
                 <a:cs typeface="Amiri" pitchFamily="2" charset="-78"/>
               </a:rPr>
               <a:t>أَلَّا أَتْرُكَ الفُطُورَ</a:t>
@@ -9579,11 +9653,12 @@
               <a:buNone/>
             </a:pPr>
             <a:r>
-              <a:rPr lang="en-US" sz="950" b="1" dirty="0">
+              <a:rPr lang="ar-SA" sz="950" b="1" dirty="0">
                 <a:solidFill>
                   <a:srgbClr val="FFFFFF"/>
                 </a:solidFill>
                 <a:latin typeface="Calibri" pitchFamily="34" charset="0"/>
+                <a:ea typeface="Amiri" pitchFamily="2" charset="-78"/>
                 <a:cs typeface="Amiri" pitchFamily="2" charset="-78"/>
               </a:rPr>
               <a:t>أَمَّا العَشَاءُ فَهُوَ</a:t>
@@ -9644,11 +9719,12 @@
               <a:buNone/>
             </a:pPr>
             <a:r>
-              <a:rPr lang="en-US" sz="950" b="1" dirty="0">
+              <a:rPr lang="ar-SA" sz="950" b="1" dirty="0">
                 <a:solidFill>
                   <a:srgbClr val="FFFFFF"/>
                 </a:solidFill>
                 <a:latin typeface="Calibri" pitchFamily="34" charset="0"/>
+                <a:ea typeface="Amiri" pitchFamily="2" charset="-78"/>
                 <a:cs typeface="Amiri" pitchFamily="2" charset="-78"/>
               </a:rPr>
               <a:t>صَحِيحٌ أَنَّ … غَيْرَ أَنَّهَا</a:t>
@@ -9709,11 +9785,12 @@
               <a:buNone/>
             </a:pPr>
             <a:r>
-              <a:rPr lang="en-US" sz="950" b="1" dirty="0">
+              <a:rPr lang="ar-SA" sz="950" b="1" dirty="0">
                 <a:solidFill>
                   <a:srgbClr val="FFFFFF"/>
                 </a:solidFill>
                 <a:latin typeface="Calibri" pitchFamily="34" charset="0"/>
+                <a:ea typeface="Amiri" pitchFamily="2" charset="-78"/>
                 <a:cs typeface="Amiri" pitchFamily="2" charset="-78"/>
               </a:rPr>
               <a:t>لَوْ كَانَ … لَطَبَخْتُ</a:t>
@@ -9847,6 +9924,7 @@
                   <a:srgbClr val="D4AF37"/>
                 </a:solidFill>
                 <a:latin typeface="Amiri" pitchFamily="2" charset="-78"/>
+                <a:ea typeface="Amiri" pitchFamily="2" charset="-78"/>
                 <a:cs typeface="Amiri" pitchFamily="2" charset="-78"/>
               </a:rPr>
               <a:t>م</a:t>
@@ -10104,6 +10182,7 @@
                   <a:srgbClr val="8A6D1E"/>
                 </a:solidFill>
                 <a:latin typeface="Amiri" pitchFamily="2" charset="-78"/>
+                <a:ea typeface="Amiri" pitchFamily="2" charset="-78"/>
                 <a:cs typeface="Amiri" pitchFamily="2" charset="-78"/>
               </a:rPr>
               <a:t>ب</a:t>
@@ -10168,6 +10247,7 @@
                   <a:srgbClr val="1B3B6F"/>
                 </a:solidFill>
                 <a:latin typeface="Amiri" pitchFamily="2" charset="-78"/>
+                <a:ea typeface="Amiri" pitchFamily="2" charset="-78"/>
                 <a:cs typeface="Amiri" pitchFamily="2" charset="-78"/>
               </a:rPr>
               <a:t>ب</a:t>
@@ -10219,6 +10299,7 @@
                   <a:srgbClr val="8A6D1E"/>
                 </a:solidFill>
                 <a:latin typeface="Amiri" pitchFamily="2" charset="-78"/>
+                <a:ea typeface="Amiri" pitchFamily="2" charset="-78"/>
                 <a:cs typeface="Amiri" pitchFamily="2" charset="-78"/>
               </a:rPr>
               <a:t>نَمُوذَجُ الإِجَابَةِ</a:t>
@@ -10332,6 +10413,7 @@
                   <a:srgbClr val="1F2A37"/>
                 </a:solidFill>
                 <a:latin typeface="Amiri" pitchFamily="2" charset="-78"/>
+                <a:ea typeface="Amiri" pitchFamily="2" charset="-78"/>
                 <a:cs typeface="Amiri" pitchFamily="2" charset="-78"/>
               </a:rPr>
               <a:t>تَخْتَلِفُ عَادَاتُ الأَكْلِ اليَوْمَ كَثِيرًا عَمَّا كَانَتْ عَلَيْهِ فِي المَاضِي. كَانَتْ جَدَّتِي تَطْبُخُ كُلَّ يَوْمٍ أَطْبَاقًا تَقْلِيدِيَّةً بِالخُضَارِ الطَّازَجَةِ، وَكَانَتِ الأُسْرَةُ كُلُّهَا تَأْكُلُ مَعًا، أَمَّا اليَوْمَ فَكَثِيرٌ مِنَ النَّاسِ يَطْلُبُونَ الوَجَبَاتِ السَّرِيعَةَ عَلَى الهَاتِفِ، وَيَأْكُلُونَ أَمَامَ الشَّاشَاتِ.</a:t>
@@ -10351,6 +10433,7 @@
                   <a:srgbClr val="1F2A37"/>
                 </a:solidFill>
                 <a:latin typeface="Amiri" pitchFamily="2" charset="-78"/>
+                <a:ea typeface="Amiri" pitchFamily="2" charset="-78"/>
                 <a:cs typeface="Amiri" pitchFamily="2" charset="-78"/>
               </a:rPr>
               <a:t>لِلْوَجَبَاتِ السَّرِيعَةِ بَعْضُ المَزَايَا؛ فَهِيَ سَهْلَةٌ وَرَخِيصَةٌ وَتُوَفِّرُ الوَقْتَ. غَيْرَ أَنَّهَا تَحْتَوِي عَلَى الدُّهُونِ وَالسُّكَّرِ، وَقَدْ تُسَبِّبُ السُّمْنَةَ إِذَا أَكَلْنَاهَا كَثِيرًا، كَمَا أَنَّ الأَطْفَالَ لَا يَعْرِفُونَ مِنْ أَيْنَ يَأْتِي طَعَامُهُمْ. أَمَّا الطَّعَامُ التَّقْلِيدِيُّ فَصِحِّيٌّ وَلَذِيذٌ، وَيَجْمَعُ الأُسْرَةَ حَوْلَ المَائِدَةِ.</a:t>
@@ -10370,6 +10453,7 @@
                   <a:srgbClr val="1F2A37"/>
                 </a:solidFill>
                 <a:latin typeface="Amiri" pitchFamily="2" charset="-78"/>
+                <a:ea typeface="Amiri" pitchFamily="2" charset="-78"/>
                 <a:cs typeface="Amiri" pitchFamily="2" charset="-78"/>
               </a:rPr>
               <a:t>فِي العُطْلَةِ المَاضِيَةِ قَضَيْتُ أُسْبُوعًا عِنْدَ جَدَّتِي، فَعَلَّمَتْنِي كَيْفَ أَطْبُخُ الكُسْكُسِي؛ قَطَّعْنَا الخُضَارَ مَعًا، وَطَبَخْنَا اللَّحْمَ سَاعَتَيْنِ، ثُمَّ أَكَلْنَاهُ مَعَ العَائِلَةِ كُلِّهَا. كَانَ أَلَذَّ طَعَامٍ أَكَلْتُهُ فِي حَيَاتِي.</a:t>
@@ -10389,6 +10473,7 @@
                   <a:srgbClr val="1F2A37"/>
                 </a:solidFill>
                 <a:latin typeface="Amiri" pitchFamily="2" charset="-78"/>
+                <a:ea typeface="Amiri" pitchFamily="2" charset="-78"/>
                 <a:cs typeface="Amiri" pitchFamily="2" charset="-78"/>
               </a:rPr>
               <a:t>فِي رَأْيِي، يَجِبُ أَنْ نُوَازِنَ بَيْنَ الاثْنَيْنِ: لَا بَأْسَ بِالوَجَبَاتِ السَّرِيعَةِ أَحْيَانًا، لٰكِنَّ الطَّبْخَ فِي البَيْتِ أَفْضَلُ. وَلَوْ تَعَلَّمَ كُلُّ الشَّبَابِ الطَّبْخَ، لَأَصْبَحَ المُجْتَمَعُ أَكْثَرَ صِحَّةً، وَلَقَلَّتِ الأَمْرَاضُ.</a:t>
@@ -10487,11 +10572,12 @@
               <a:buNone/>
             </a:pPr>
             <a:r>
-              <a:rPr lang="en-US" sz="950" b="1" dirty="0">
+              <a:rPr lang="ar-SA" sz="950" b="1" dirty="0">
                 <a:solidFill>
                   <a:srgbClr val="FFFFFF"/>
                 </a:solidFill>
                 <a:latin typeface="Calibri" pitchFamily="34" charset="0"/>
+                <a:ea typeface="Amiri" pitchFamily="2" charset="-78"/>
                 <a:cs typeface="Amiri" pitchFamily="2" charset="-78"/>
               </a:rPr>
               <a:t>كَانَتْ جَدَّتِي تَطْبُخُ</a:t>
@@ -10552,11 +10638,12 @@
               <a:buNone/>
             </a:pPr>
             <a:r>
-              <a:rPr lang="en-US" sz="950" b="1" dirty="0">
+              <a:rPr lang="ar-SA" sz="950" b="1" dirty="0">
                 <a:solidFill>
                   <a:srgbClr val="FFFFFF"/>
                 </a:solidFill>
                 <a:latin typeface="Calibri" pitchFamily="34" charset="0"/>
+                <a:ea typeface="Amiri" pitchFamily="2" charset="-78"/>
                 <a:cs typeface="Amiri" pitchFamily="2" charset="-78"/>
               </a:rPr>
               <a:t>غَيْرَ أَنَّهَا تَحْتَوِي</a:t>
@@ -10617,11 +10704,12 @@
               <a:buNone/>
             </a:pPr>
             <a:r>
-              <a:rPr lang="en-US" sz="950" b="1" dirty="0">
+              <a:rPr lang="ar-SA" sz="950" b="1" dirty="0">
                 <a:solidFill>
                   <a:srgbClr val="FFFFFF"/>
                 </a:solidFill>
                 <a:latin typeface="Calibri" pitchFamily="34" charset="0"/>
+                <a:ea typeface="Amiri" pitchFamily="2" charset="-78"/>
                 <a:cs typeface="Amiri" pitchFamily="2" charset="-78"/>
               </a:rPr>
               <a:t>أَمَّا الطَّعَامُ التَّقْلِيدِيُّ فَصِحِّيٌّ</a:t>
@@ -10682,11 +10770,12 @@
               <a:buNone/>
             </a:pPr>
             <a:r>
-              <a:rPr lang="en-US" sz="950" b="1" dirty="0">
+              <a:rPr lang="ar-SA" sz="950" b="1" dirty="0">
                 <a:solidFill>
                   <a:srgbClr val="FFFFFF"/>
                 </a:solidFill>
                 <a:latin typeface="Calibri" pitchFamily="34" charset="0"/>
+                <a:ea typeface="Amiri" pitchFamily="2" charset="-78"/>
                 <a:cs typeface="Amiri" pitchFamily="2" charset="-78"/>
               </a:rPr>
               <a:t>لَوْ … لَأَصْبَحَ</a:t>
@@ -10820,6 +10909,7 @@
                   <a:srgbClr val="D4AF37"/>
                 </a:solidFill>
                 <a:latin typeface="Amiri" pitchFamily="2" charset="-78"/>
+                <a:ea typeface="Amiri" pitchFamily="2" charset="-78"/>
                 <a:cs typeface="Amiri" pitchFamily="2" charset="-78"/>
               </a:rPr>
               <a:t>م</a:t>
@@ -11140,6 +11230,7 @@
                   <a:srgbClr val="8A6D1E"/>
                 </a:solidFill>
                 <a:latin typeface="Amiri" pitchFamily="2" charset="-78"/>
+                <a:ea typeface="Amiri" pitchFamily="2" charset="-78"/>
                 <a:cs typeface="Amiri" pitchFamily="2" charset="-78"/>
               </a:rPr>
               <a:t>قَيِّمْ عَمَلَكَ</a:t>
@@ -12384,6 +12475,7 @@
                   <a:srgbClr val="FFFFFF"/>
                 </a:solidFill>
                 <a:latin typeface="Amiri" pitchFamily="2" charset="-78"/>
+                <a:ea typeface="Amiri" pitchFamily="2" charset="-78"/>
                 <a:cs typeface="Amiri" pitchFamily="2" charset="-78"/>
               </a:rPr>
               <a:t>أَحْسَنْتُمْ! إِلَى اللِّقَاءِ</a:t>
@@ -12536,6 +12628,7 @@
                   <a:srgbClr val="D4AF37"/>
                 </a:solidFill>
                 <a:latin typeface="Amiri" pitchFamily="2" charset="-78"/>
+                <a:ea typeface="Amiri" pitchFamily="2" charset="-78"/>
                 <a:cs typeface="Amiri" pitchFamily="2" charset="-78"/>
               </a:rPr>
               <a:t>وَرْشَةُ التَّدْرِيبِ</a:t>
@@ -12669,6 +12762,7 @@
                   <a:srgbClr val="D4AF37"/>
                 </a:solidFill>
                 <a:latin typeface="Amiri" pitchFamily="2" charset="-78"/>
+                <a:ea typeface="Amiri" pitchFamily="2" charset="-78"/>
                 <a:cs typeface="Amiri" pitchFamily="2" charset="-78"/>
               </a:rPr>
               <a:t>م</a:t>
@@ -12989,6 +13083,7 @@
                   <a:srgbClr val="8A6D1E"/>
                 </a:solidFill>
                 <a:latin typeface="Amiri" pitchFamily="2" charset="-78"/>
+                <a:ea typeface="Amiri" pitchFamily="2" charset="-78"/>
                 <a:cs typeface="Amiri" pitchFamily="2" charset="-78"/>
               </a:rPr>
               <a:t>آدَابُ الصَّفِّ</a:t>
@@ -14520,6 +14615,7 @@
                   <a:srgbClr val="D4AF37"/>
                 </a:solidFill>
                 <a:latin typeface="Amiri" pitchFamily="2" charset="-78"/>
+                <a:ea typeface="Amiri" pitchFamily="2" charset="-78"/>
                 <a:cs typeface="Amiri" pitchFamily="2" charset="-78"/>
               </a:rPr>
               <a:t>م</a:t>
@@ -14840,6 +14936,7 @@
                   <a:srgbClr val="8A6D1E"/>
                 </a:solidFill>
                 <a:latin typeface="Amiri" pitchFamily="2" charset="-78"/>
+                <a:ea typeface="Amiri" pitchFamily="2" charset="-78"/>
                 <a:cs typeface="Amiri" pitchFamily="2" charset="-78"/>
               </a:rPr>
               <a:t>خَرِيطَةُ الوَرْشَةِ</a:t>
@@ -15154,6 +15251,7 @@
                   <a:srgbClr val="1B3B6F"/>
                 </a:solidFill>
                 <a:latin typeface="Amiri" pitchFamily="2" charset="-78"/>
+                <a:ea typeface="Amiri" pitchFamily="2" charset="-78"/>
                 <a:cs typeface="Amiri" pitchFamily="2" charset="-78"/>
               </a:rPr>
               <a:t>كَيْفَ</a:t>
@@ -15430,6 +15528,7 @@
                   <a:srgbClr val="1E6B52"/>
                 </a:solidFill>
                 <a:latin typeface="Amiri" pitchFamily="2" charset="-78"/>
+                <a:ea typeface="Amiri" pitchFamily="2" charset="-78"/>
                 <a:cs typeface="Amiri" pitchFamily="2" charset="-78"/>
               </a:rPr>
               <a:t>الاسْتِمَارَةُ</a:t>
@@ -15706,6 +15805,7 @@
                   <a:srgbClr val="1E6B52"/>
                 </a:solidFill>
                 <a:latin typeface="Amiri" pitchFamily="2" charset="-78"/>
+                <a:ea typeface="Amiri" pitchFamily="2" charset="-78"/>
                 <a:cs typeface="Amiri" pitchFamily="2" charset="-78"/>
               </a:rPr>
               <a:t>الرِّسَالَةُ</a:t>
@@ -15982,6 +16082,7 @@
                   <a:srgbClr val="1E6B52"/>
                 </a:solidFill>
                 <a:latin typeface="Amiri" pitchFamily="2" charset="-78"/>
+                <a:ea typeface="Amiri" pitchFamily="2" charset="-78"/>
                 <a:cs typeface="Amiri" pitchFamily="2" charset="-78"/>
               </a:rPr>
               <a:t>المَقَالُ</a:t>
@@ -16258,6 +16359,7 @@
                   <a:srgbClr val="8A6D1E"/>
                 </a:solidFill>
                 <a:latin typeface="Amiri" pitchFamily="2" charset="-78"/>
+                <a:ea typeface="Amiri" pitchFamily="2" charset="-78"/>
                 <a:cs typeface="Amiri" pitchFamily="2" charset="-78"/>
               </a:rPr>
               <a:t>قَيِّمْ</a:t>
@@ -16501,6 +16603,7 @@
                   <a:srgbClr val="D4AF37"/>
                 </a:solidFill>
                 <a:latin typeface="Amiri" pitchFamily="2" charset="-78"/>
+                <a:ea typeface="Amiri" pitchFamily="2" charset="-78"/>
                 <a:cs typeface="Amiri" pitchFamily="2" charset="-78"/>
               </a:rPr>
               <a:t>م</a:t>
@@ -16821,6 +16924,7 @@
                   <a:srgbClr val="8A6D1E"/>
                 </a:solidFill>
                 <a:latin typeface="Amiri" pitchFamily="2" charset="-78"/>
+                <a:ea typeface="Amiri" pitchFamily="2" charset="-78"/>
                 <a:cs typeface="Amiri" pitchFamily="2" charset="-78"/>
               </a:rPr>
               <a:t>امْتِحَانُ الكِتَابَةِ</a:t>
@@ -17445,6 +17549,7 @@
                   <a:srgbClr val="1B3B6F"/>
                 </a:solidFill>
                 <a:latin typeface="Amiri" pitchFamily="2" charset="-78"/>
+                <a:ea typeface="Amiri" pitchFamily="2" charset="-78"/>
                 <a:cs typeface="Amiri" pitchFamily="2" charset="-78"/>
               </a:rPr>
               <a:t>أُفَضِّلُ … عَلَى …</a:t>
@@ -17544,6 +17649,7 @@
                   <a:srgbClr val="1B3B6F"/>
                 </a:solidFill>
                 <a:latin typeface="Amiri" pitchFamily="2" charset="-78"/>
+                <a:ea typeface="Amiri" pitchFamily="2" charset="-78"/>
                 <a:cs typeface="Amiri" pitchFamily="2" charset="-78"/>
               </a:rPr>
               <a:t>عَصِيرُ البُرْتُقَالِ · طَبَقٌ لَذِيذٌ</a:t>
@@ -17643,6 +17749,7 @@
                   <a:srgbClr val="1B3B6F"/>
                 </a:solidFill>
                 <a:latin typeface="Amiri" pitchFamily="2" charset="-78"/>
+                <a:ea typeface="Amiri" pitchFamily="2" charset="-78"/>
                 <a:cs typeface="Amiri" pitchFamily="2" charset="-78"/>
               </a:rPr>
               <a:t>لَا آكُلُ … لِأَنَّ …</a:t>
@@ -17814,6 +17921,7 @@
                   <a:srgbClr val="D4AF37"/>
                 </a:solidFill>
                 <a:latin typeface="Amiri" pitchFamily="2" charset="-78"/>
+                <a:ea typeface="Amiri" pitchFamily="2" charset="-78"/>
                 <a:cs typeface="Amiri" pitchFamily="2" charset="-78"/>
               </a:rPr>
               <a:t>م</a:t>
@@ -18134,6 +18242,7 @@
                   <a:srgbClr val="8A6D1E"/>
                 </a:solidFill>
                 <a:latin typeface="Amiri" pitchFamily="2" charset="-78"/>
+                <a:ea typeface="Amiri" pitchFamily="2" charset="-78"/>
                 <a:cs typeface="Amiri" pitchFamily="2" charset="-78"/>
               </a:rPr>
               <a:t>اسْتِمَارَةُ مِهْرَجَانِ الطَّعَامِ</a:t>
@@ -18490,6 +18599,7 @@
                   <a:srgbClr val="1B3B6F"/>
                 </a:solidFill>
                 <a:latin typeface="Amiri" pitchFamily="2" charset="-78"/>
+                <a:ea typeface="Amiri" pitchFamily="2" charset="-78"/>
                 <a:cs typeface="Amiri" pitchFamily="2" charset="-78"/>
               </a:rPr>
               <a:t>الاسْمُ</a:t>
@@ -18734,6 +18844,7 @@
                   <a:srgbClr val="1B3B6F"/>
                 </a:solidFill>
                 <a:latin typeface="Amiri" pitchFamily="2" charset="-78"/>
+                <a:ea typeface="Amiri" pitchFamily="2" charset="-78"/>
                 <a:cs typeface="Amiri" pitchFamily="2" charset="-78"/>
               </a:rPr>
               <a:t>العُمْرُ</a:t>
@@ -18978,6 +19089,7 @@
                   <a:srgbClr val="1B3B6F"/>
                 </a:solidFill>
                 <a:latin typeface="Amiri" pitchFamily="2" charset="-78"/>
+                <a:ea typeface="Amiri" pitchFamily="2" charset="-78"/>
                 <a:cs typeface="Amiri" pitchFamily="2" charset="-78"/>
               </a:rPr>
               <a:t>وَجْبَتُكَ المُفَضَّلَةُ</a:t>
@@ -19222,6 +19334,7 @@
                   <a:srgbClr val="1B3B6F"/>
                 </a:solidFill>
                 <a:latin typeface="Amiri" pitchFamily="2" charset="-78"/>
+                <a:ea typeface="Amiri" pitchFamily="2" charset="-78"/>
                 <a:cs typeface="Amiri" pitchFamily="2" charset="-78"/>
               </a:rPr>
               <a:t>مَشْرُوبُكَ المُفَضَّلُ</a:t>
@@ -19466,6 +19579,7 @@
                   <a:srgbClr val="1B3B6F"/>
                 </a:solidFill>
                 <a:latin typeface="Amiri" pitchFamily="2" charset="-78"/>
+                <a:ea typeface="Amiri" pitchFamily="2" charset="-78"/>
                 <a:cs typeface="Amiri" pitchFamily="2" charset="-78"/>
               </a:rPr>
               <a:t>طَعَامٌ لَا تَأْكُلُهُ</a:t>
@@ -19710,6 +19824,7 @@
                   <a:srgbClr val="1B3B6F"/>
                 </a:solidFill>
                 <a:latin typeface="Amiri" pitchFamily="2" charset="-78"/>
+                <a:ea typeface="Amiri" pitchFamily="2" charset="-78"/>
                 <a:cs typeface="Amiri" pitchFamily="2" charset="-78"/>
               </a:rPr>
               <a:t>طَبَقٌ مِنْ بَلَدِ أُسْرَتِكَ</a:t>
@@ -19954,6 +20069,7 @@
                   <a:srgbClr val="1B3B6F"/>
                 </a:solidFill>
                 <a:latin typeface="Amiri" pitchFamily="2" charset="-78"/>
+                <a:ea typeface="Amiri" pitchFamily="2" charset="-78"/>
                 <a:cs typeface="Amiri" pitchFamily="2" charset="-78"/>
               </a:rPr>
               <a:t>كَمْ وَجْبَةً تَأْكُلُ يَوْمِيًّا؟</a:t>
@@ -20133,6 +20249,7 @@
                   <a:srgbClr val="1B3B6F"/>
                 </a:solidFill>
                 <a:latin typeface="Amiri" pitchFamily="2" charset="-78"/>
+                <a:ea typeface="Amiri" pitchFamily="2" charset="-78"/>
                 <a:cs typeface="Amiri" pitchFamily="2" charset="-78"/>
               </a:rPr>
               <a:t>جُمْلَةٌ: لِمَاذَا تُحِبُّ الطَّبْخَ؟</a:t>
@@ -20342,6 +20459,7 @@
                   <a:srgbClr val="D4AF37"/>
                 </a:solidFill>
                 <a:latin typeface="Amiri" pitchFamily="2" charset="-78"/>
+                <a:ea typeface="Amiri" pitchFamily="2" charset="-78"/>
                 <a:cs typeface="Amiri" pitchFamily="2" charset="-78"/>
               </a:rPr>
               <a:t>م</a:t>
@@ -20662,6 +20780,7 @@
                   <a:srgbClr val="8A6D1E"/>
                 </a:solidFill>
                 <a:latin typeface="Amiri" pitchFamily="2" charset="-78"/>
+                <a:ea typeface="Amiri" pitchFamily="2" charset="-78"/>
                 <a:cs typeface="Amiri" pitchFamily="2" charset="-78"/>
               </a:rPr>
               <a:t>نَمُوذَجُ الإِجَابَةِ</a:t>
@@ -20980,6 +21099,7 @@
                   <a:srgbClr val="1B3B6F"/>
                 </a:solidFill>
                 <a:latin typeface="Amiri" pitchFamily="2" charset="-78"/>
+                <a:ea typeface="Amiri" pitchFamily="2" charset="-78"/>
                 <a:cs typeface="Amiri" pitchFamily="2" charset="-78"/>
               </a:rPr>
               <a:t>مَرْيَمُ حَسَنٌ</a:t>
@@ -21018,6 +21138,7 @@
                   <a:srgbClr val="1B3B6F"/>
                 </a:solidFill>
                 <a:latin typeface="Amiri" pitchFamily="2" charset="-78"/>
+                <a:ea typeface="Amiri" pitchFamily="2" charset="-78"/>
                 <a:cs typeface="Amiri" pitchFamily="2" charset="-78"/>
               </a:rPr>
               <a:t>الاسْمُ</a:t>
@@ -21159,6 +21280,7 @@
                   <a:srgbClr val="1B3B6F"/>
                 </a:solidFill>
                 <a:latin typeface="Amiri" pitchFamily="2" charset="-78"/>
+                <a:ea typeface="Amiri" pitchFamily="2" charset="-78"/>
                 <a:cs typeface="Amiri" pitchFamily="2" charset="-78"/>
               </a:rPr>
               <a:t>خَمْسَ عَشْرَةَ سَنَةً</a:t>
@@ -21197,6 +21319,7 @@
                   <a:srgbClr val="1B3B6F"/>
                 </a:solidFill>
                 <a:latin typeface="Amiri" pitchFamily="2" charset="-78"/>
+                <a:ea typeface="Amiri" pitchFamily="2" charset="-78"/>
                 <a:cs typeface="Amiri" pitchFamily="2" charset="-78"/>
               </a:rPr>
               <a:t>العُمْرُ</a:t>
@@ -21338,6 +21461,7 @@
                   <a:srgbClr val="1B3B6F"/>
                 </a:solidFill>
                 <a:latin typeface="Amiri" pitchFamily="2" charset="-78"/>
+                <a:ea typeface="Amiri" pitchFamily="2" charset="-78"/>
                 <a:cs typeface="Amiri" pitchFamily="2" charset="-78"/>
               </a:rPr>
               <a:t>الدَّجَاجُ بِالأُرْزِ</a:t>
@@ -21376,6 +21500,7 @@
                   <a:srgbClr val="1B3B6F"/>
                 </a:solidFill>
                 <a:latin typeface="Amiri" pitchFamily="2" charset="-78"/>
+                <a:ea typeface="Amiri" pitchFamily="2" charset="-78"/>
                 <a:cs typeface="Amiri" pitchFamily="2" charset="-78"/>
               </a:rPr>
               <a:t>وَجْبَتُكَ المُفَضَّلَةُ</a:t>
@@ -21517,6 +21642,7 @@
                   <a:srgbClr val="1B3B6F"/>
                 </a:solidFill>
                 <a:latin typeface="Amiri" pitchFamily="2" charset="-78"/>
+                <a:ea typeface="Amiri" pitchFamily="2" charset="-78"/>
                 <a:cs typeface="Amiri" pitchFamily="2" charset="-78"/>
               </a:rPr>
               <a:t>عَصِيرُ البُرْتُقَالِ</a:t>
@@ -21555,6 +21681,7 @@
                   <a:srgbClr val="1B3B6F"/>
                 </a:solidFill>
                 <a:latin typeface="Amiri" pitchFamily="2" charset="-78"/>
+                <a:ea typeface="Amiri" pitchFamily="2" charset="-78"/>
                 <a:cs typeface="Amiri" pitchFamily="2" charset="-78"/>
               </a:rPr>
               <a:t>مَشْرُوبُكَ المُفَضَّلُ</a:t>
@@ -21696,6 +21823,7 @@
                   <a:srgbClr val="1B3B6F"/>
                 </a:solidFill>
                 <a:latin typeface="Amiri" pitchFamily="2" charset="-78"/>
+                <a:ea typeface="Amiri" pitchFamily="2" charset="-78"/>
                 <a:cs typeface="Amiri" pitchFamily="2" charset="-78"/>
               </a:rPr>
               <a:t>الفُولُ السُّودَانِيُّ</a:t>
@@ -21734,6 +21862,7 @@
                   <a:srgbClr val="1B3B6F"/>
                 </a:solidFill>
                 <a:latin typeface="Amiri" pitchFamily="2" charset="-78"/>
+                <a:ea typeface="Amiri" pitchFamily="2" charset="-78"/>
                 <a:cs typeface="Amiri" pitchFamily="2" charset="-78"/>
               </a:rPr>
               <a:t>طَعَامٌ لَا تَأْكُلُهُ</a:t>
@@ -21875,6 +22004,7 @@
                   <a:srgbClr val="1B3B6F"/>
                 </a:solidFill>
                 <a:latin typeface="Amiri" pitchFamily="2" charset="-78"/>
+                <a:ea typeface="Amiri" pitchFamily="2" charset="-78"/>
                 <a:cs typeface="Amiri" pitchFamily="2" charset="-78"/>
               </a:rPr>
               <a:t>البِرْيَانِي</a:t>
@@ -21913,6 +22043,7 @@
                   <a:srgbClr val="1B3B6F"/>
                 </a:solidFill>
                 <a:latin typeface="Amiri" pitchFamily="2" charset="-78"/>
+                <a:ea typeface="Amiri" pitchFamily="2" charset="-78"/>
                 <a:cs typeface="Amiri" pitchFamily="2" charset="-78"/>
               </a:rPr>
               <a:t>طَبَقٌ مِنْ بَلَدِ أُسْرَتِكَ</a:t>
@@ -22054,6 +22185,7 @@
                   <a:srgbClr val="1B3B6F"/>
                 </a:solidFill>
                 <a:latin typeface="Amiri" pitchFamily="2" charset="-78"/>
+                <a:ea typeface="Amiri" pitchFamily="2" charset="-78"/>
                 <a:cs typeface="Amiri" pitchFamily="2" charset="-78"/>
               </a:rPr>
               <a:t>ثَلَاثُ وَجَبَاتٍ</a:t>
@@ -22092,6 +22224,7 @@
                   <a:srgbClr val="1B3B6F"/>
                 </a:solidFill>
                 <a:latin typeface="Amiri" pitchFamily="2" charset="-78"/>
+                <a:ea typeface="Amiri" pitchFamily="2" charset="-78"/>
                 <a:cs typeface="Amiri" pitchFamily="2" charset="-78"/>
               </a:rPr>
               <a:t>كَمْ وَجْبَةً تَأْكُلُ يَوْمِيًّا؟</a:t>
@@ -22233,6 +22366,7 @@
                   <a:srgbClr val="1B3B6F"/>
                 </a:solidFill>
                 <a:latin typeface="Amiri" pitchFamily="2" charset="-78"/>
+                <a:ea typeface="Amiri" pitchFamily="2" charset="-78"/>
                 <a:cs typeface="Amiri" pitchFamily="2" charset="-78"/>
               </a:rPr>
               <a:t>أُحِبُّ الطَّبْخَ لِأَنَّهُ مُمْتِعٌ وَمُفِيدٌ لِأُسْرَتِي.</a:t>
@@ -22271,6 +22405,7 @@
                   <a:srgbClr val="1B3B6F"/>
                 </a:solidFill>
                 <a:latin typeface="Amiri" pitchFamily="2" charset="-78"/>
+                <a:ea typeface="Amiri" pitchFamily="2" charset="-78"/>
                 <a:cs typeface="Amiri" pitchFamily="2" charset="-78"/>
               </a:rPr>
               <a:t>جُمْلَةٌ: لِمَاذَا تُحِبُّ الطَّبْخَ؟</a:t>
@@ -22480,6 +22615,7 @@
                   <a:srgbClr val="D4AF37"/>
                 </a:solidFill>
                 <a:latin typeface="Amiri" pitchFamily="2" charset="-78"/>
+                <a:ea typeface="Amiri" pitchFamily="2" charset="-78"/>
                 <a:cs typeface="Amiri" pitchFamily="2" charset="-78"/>
               </a:rPr>
               <a:t>م</a:t>
@@ -22800,6 +22936,7 @@
                   <a:srgbClr val="8A6D1E"/>
                 </a:solidFill>
                 <a:latin typeface="Amiri" pitchFamily="2" charset="-78"/>
+                <a:ea typeface="Amiri" pitchFamily="2" charset="-78"/>
                 <a:cs typeface="Amiri" pitchFamily="2" charset="-78"/>
               </a:rPr>
               <a:t>رِسَالَةٌ إِلَى الأُسْرَةِ المُضِيفَةِ</a:t>
@@ -23275,6 +23412,7 @@
                   <a:srgbClr val="1B3B6F"/>
                 </a:solidFill>
                 <a:latin typeface="Amiri" pitchFamily="2" charset="-78"/>
+                <a:ea typeface="Amiri" pitchFamily="2" charset="-78"/>
                 <a:cs typeface="Amiri" pitchFamily="2" charset="-78"/>
               </a:rPr>
               <a:t>فِي الفُطُورِ آكُلُ …</a:t>
@@ -23351,6 +23489,7 @@
                   <a:srgbClr val="1B3B6F"/>
                 </a:solidFill>
                 <a:latin typeface="Amiri" pitchFamily="2" charset="-78"/>
+                <a:ea typeface="Amiri" pitchFamily="2" charset="-78"/>
                 <a:cs typeface="Amiri" pitchFamily="2" charset="-78"/>
               </a:rPr>
               <a:t>طَبَقِي المُفَضَّلُ هُوَ …</a:t>
@@ -23427,6 +23566,7 @@
                   <a:srgbClr val="1B3B6F"/>
                 </a:solidFill>
                 <a:latin typeface="Amiri" pitchFamily="2" charset="-78"/>
+                <a:ea typeface="Amiri" pitchFamily="2" charset="-78"/>
                 <a:cs typeface="Amiri" pitchFamily="2" charset="-78"/>
               </a:rPr>
               <a:t>لَا آكُلُ إِلَّا اللَّحْمَ الحَلَالَ.</a:t>
@@ -23503,6 +23643,7 @@
                   <a:srgbClr val="1B3B6F"/>
                 </a:solidFill>
                 <a:latin typeface="Amiri" pitchFamily="2" charset="-78"/>
+                <a:ea typeface="Amiri" pitchFamily="2" charset="-78"/>
                 <a:cs typeface="Amiri" pitchFamily="2" charset="-78"/>
               </a:rPr>
               <a:t>أُرِيدُ أَنْ أُجَرِّبَ …</a:t>
@@ -23674,6 +23815,7 @@
                   <a:srgbClr val="D4AF37"/>
                 </a:solidFill>
                 <a:latin typeface="Amiri" pitchFamily="2" charset="-78"/>
+                <a:ea typeface="Amiri" pitchFamily="2" charset="-78"/>
                 <a:cs typeface="Amiri" pitchFamily="2" charset="-78"/>
               </a:rPr>
               <a:t>م</a:t>
@@ -23994,6 +24136,7 @@
                   <a:srgbClr val="8A6D1E"/>
                 </a:solidFill>
                 <a:latin typeface="Amiri" pitchFamily="2" charset="-78"/>
+                <a:ea typeface="Amiri" pitchFamily="2" charset="-78"/>
                 <a:cs typeface="Amiri" pitchFamily="2" charset="-78"/>
               </a:rPr>
               <a:t>نَصُّ السُّؤَالِ</a:t>
@@ -24277,6 +24420,7 @@
                   <a:srgbClr val="1B3B6F"/>
                 </a:solidFill>
                 <a:latin typeface="Amiri" pitchFamily="2" charset="-78"/>
+                <a:ea typeface="Amiri" pitchFamily="2" charset="-78"/>
                 <a:cs typeface="Amiri" pitchFamily="2" charset="-78"/>
               </a:rPr>
               <a:t>سَتَسْكُنُ عِنْدَ أُسْرَةٍ فِي الأُرْدُنِّ. اكْتُبْ رِسَالَةً إِلِكْتِرُونِيَّةً إِلَى أُخْتِكَ المُضِيفَةِ (٨٠–٩٠ كَلِمَةً).</a:t>
@@ -24418,6 +24562,7 @@
                   <a:srgbClr val="1B3B6F"/>
                 </a:solidFill>
                 <a:latin typeface="Amiri" pitchFamily="2" charset="-78"/>
+                <a:ea typeface="Amiri" pitchFamily="2" charset="-78"/>
                 <a:cs typeface="Amiri" pitchFamily="2" charset="-78"/>
               </a:rPr>
               <a:t>مَاذَا تَأْكُلُ عَادَةً فِي وَجَبَاتِكَ؟</a:t>
@@ -24559,6 +24704,7 @@
                   <a:srgbClr val="1B3B6F"/>
                 </a:solidFill>
                 <a:latin typeface="Amiri" pitchFamily="2" charset="-78"/>
+                <a:ea typeface="Amiri" pitchFamily="2" charset="-78"/>
                 <a:cs typeface="Amiri" pitchFamily="2" charset="-78"/>
               </a:rPr>
               <a:t>مَا طَبَقُكَ المُفَضَّلُ؟ وَلِمَاذَا؟</a:t>
@@ -24700,6 +24846,7 @@
                   <a:srgbClr val="1B3B6F"/>
                 </a:solidFill>
                 <a:latin typeface="Amiri" pitchFamily="2" charset="-78"/>
+                <a:ea typeface="Amiri" pitchFamily="2" charset="-78"/>
                 <a:cs typeface="Amiri" pitchFamily="2" charset="-78"/>
               </a:rPr>
               <a:t>مَا الطَّعَامُ الَّذِي لَا تَأْكُلُهُ؟</a:t>
@@ -24841,6 +24988,7 @@
                   <a:srgbClr val="1B3B6F"/>
                 </a:solidFill>
                 <a:latin typeface="Amiri" pitchFamily="2" charset="-78"/>
+                <a:ea typeface="Amiri" pitchFamily="2" charset="-78"/>
                 <a:cs typeface="Amiri" pitchFamily="2" charset="-78"/>
               </a:rPr>
               <a:t>مَاذَا أَكَلْتَ مُؤَخَّرًا، وَمَاذَا تُرِيدُ أَنْ تُجَرِّبَ فِي الأُرْدُنِّ؟</a:t>
@@ -25050,6 +25198,7 @@
                   <a:srgbClr val="D4AF37"/>
                 </a:solidFill>
                 <a:latin typeface="Amiri" pitchFamily="2" charset="-78"/>
+                <a:ea typeface="Amiri" pitchFamily="2" charset="-78"/>
                 <a:cs typeface="Amiri" pitchFamily="2" charset="-78"/>
               </a:rPr>
               <a:t>م</a:t>
@@ -25370,6 +25519,7 @@
                   <a:srgbClr val="8A6D1E"/>
                 </a:solidFill>
                 <a:latin typeface="Amiri" pitchFamily="2" charset="-78"/>
+                <a:ea typeface="Amiri" pitchFamily="2" charset="-78"/>
                 <a:cs typeface="Amiri" pitchFamily="2" charset="-78"/>
               </a:rPr>
               <a:t>قَوَالِبُ الكِتَابَةِ</a:t>
@@ -25650,6 +25800,7 @@
                   <a:srgbClr val="1B3B6F"/>
                 </a:solidFill>
                 <a:latin typeface="Amiri" pitchFamily="2" charset="-78"/>
+                <a:ea typeface="Amiri" pitchFamily="2" charset="-78"/>
                 <a:cs typeface="Amiri" pitchFamily="2" charset="-78"/>
               </a:rPr>
               <a:t>مَرْحَبًا يَا ______ ، أَنَا ______ .</a:t>
@@ -25856,6 +26007,7 @@
                   <a:srgbClr val="1B3B6F"/>
                 </a:solidFill>
                 <a:latin typeface="Amiri" pitchFamily="2" charset="-78"/>
+                <a:ea typeface="Amiri" pitchFamily="2" charset="-78"/>
                 <a:cs typeface="Amiri" pitchFamily="2" charset="-78"/>
               </a:rPr>
               <a:t>فِي الفُطُورِ آكُلُ ______ ، وَفِي العَشَاءِ آكُلُ ______ .</a:t>
@@ -26062,6 +26214,7 @@
                   <a:srgbClr val="1B3B6F"/>
                 </a:solidFill>
                 <a:latin typeface="Amiri" pitchFamily="2" charset="-78"/>
+                <a:ea typeface="Amiri" pitchFamily="2" charset="-78"/>
                 <a:cs typeface="Amiri" pitchFamily="2" charset="-78"/>
               </a:rPr>
               <a:t>طَبَقِي المُفَضَّلُ هُوَ ______ لِأَنَّهُ ______ .</a:t>
@@ -26268,6 +26421,7 @@
                   <a:srgbClr val="1B3B6F"/>
                 </a:solidFill>
                 <a:latin typeface="Amiri" pitchFamily="2" charset="-78"/>
+                <a:ea typeface="Amiri" pitchFamily="2" charset="-78"/>
                 <a:cs typeface="Amiri" pitchFamily="2" charset="-78"/>
               </a:rPr>
               <a:t>لَا آكُلُ ______ .</a:t>
@@ -26474,6 +26628,7 @@
                   <a:srgbClr val="1B3B6F"/>
                 </a:solidFill>
                 <a:latin typeface="Amiri" pitchFamily="2" charset="-78"/>
+                <a:ea typeface="Amiri" pitchFamily="2" charset="-78"/>
                 <a:cs typeface="Amiri" pitchFamily="2" charset="-78"/>
               </a:rPr>
               <a:t>أَمْسِ أَكَلْتُ ______ . فِي الأُرْدُنِّ أُرِيدُ أَنْ آكُلَ ______ .</a:t>
@@ -26680,6 +26835,7 @@
                   <a:srgbClr val="1B3B6F"/>
                 </a:solidFill>
                 <a:latin typeface="Amiri" pitchFamily="2" charset="-78"/>
+                <a:ea typeface="Amiri" pitchFamily="2" charset="-78"/>
                 <a:cs typeface="Amiri" pitchFamily="2" charset="-78"/>
               </a:rPr>
               <a:t>مَعَ السَّلَامَةِ، ______</a:t>
@@ -26919,13 +27075,9 @@
     <a:fontScheme name="Office">
       <a:majorFont>
         <a:latin typeface="Calibri Light" panose="020F0302020204030204"/>
-        <a:ea typeface=""/>
-        <a:cs typeface=""/>
-        <a:font script="Jpan" typeface="游ゴシック Light"/>
-        <a:font script="Hang" typeface="맑은 고딕"/>
-        <a:font script="Hans" typeface="等线 Light"/>
-        <a:font script="Hant" typeface="新細明體"/>
-        <a:font script="Arab" typeface="Times New Roman"/>
+        <a:ea typeface="Amiri" pitchFamily="2" charset="-78"/>
+        <a:cs typeface="Amiri" pitchFamily="2" charset="-78"/>
+        <a:font script="Arab" typeface="Amiri"/>
         <a:font script="Hebr" typeface="Times New Roman"/>
         <a:font script="Thai" typeface="Angsana New"/>
         <a:font script="Ethi" typeface="Nyala"/>
@@ -26971,13 +27123,9 @@
       </a:majorFont>
       <a:minorFont>
         <a:latin typeface="Calibri" panose="020F0502020204030204"/>
-        <a:ea typeface=""/>
-        <a:cs typeface=""/>
-        <a:font script="Jpan" typeface="游ゴシック"/>
-        <a:font script="Hang" typeface="맑은 고딕"/>
-        <a:font script="Hans" typeface="等线"/>
-        <a:font script="Hant" typeface="新細明體"/>
-        <a:font script="Arab" typeface="Arial"/>
+        <a:ea typeface="Amiri" pitchFamily="2" charset="-78"/>
+        <a:cs typeface="Amiri" pitchFamily="2" charset="-78"/>
+        <a:font script="Arab" typeface="Amiri"/>
         <a:font script="Hebr" typeface="Arial"/>
         <a:font script="Thai" typeface="Cordia New"/>
         <a:font script="Ethi" typeface="Nyala"/>

--- a/Topic_A/Exam_Practice/AT-A-L04_Writing_Workshop_Food_and_Drink_Meals_and_Preferences.pptx
+++ b/Topic_A/Exam_Practice/AT-A-L04_Writing_Workshop_Food_and_Drink_Meals_and_Preferences.pptx
@@ -3852,7 +3852,7 @@
                 <a:solidFill>
                   <a:srgbClr val="FFFFFF"/>
                 </a:solidFill>
-                <a:latin typeface="Calibri" pitchFamily="34" charset="0"/>
+                <a:latin typeface="Amiri" pitchFamily="2" charset="-78"/>
                 <a:ea typeface="Amiri" pitchFamily="2" charset="-78"/>
                 <a:cs typeface="Amiri" pitchFamily="2" charset="-78"/>
               </a:rPr>
@@ -3918,7 +3918,7 @@
                 <a:solidFill>
                   <a:srgbClr val="FFFFFF"/>
                 </a:solidFill>
-                <a:latin typeface="Calibri" pitchFamily="34" charset="0"/>
+                <a:latin typeface="Amiri" pitchFamily="2" charset="-78"/>
                 <a:ea typeface="Amiri" pitchFamily="2" charset="-78"/>
                 <a:cs typeface="Amiri" pitchFamily="2" charset="-78"/>
               </a:rPr>
@@ -3984,7 +3984,7 @@
                 <a:solidFill>
                   <a:srgbClr val="FFFFFF"/>
                 </a:solidFill>
-                <a:latin typeface="Calibri" pitchFamily="34" charset="0"/>
+                <a:latin typeface="Amiri" pitchFamily="2" charset="-78"/>
                 <a:ea typeface="Amiri" pitchFamily="2" charset="-78"/>
                 <a:cs typeface="Amiri" pitchFamily="2" charset="-78"/>
               </a:rPr>
@@ -4050,7 +4050,7 @@
                 <a:solidFill>
                   <a:srgbClr val="FFFFFF"/>
                 </a:solidFill>
-                <a:latin typeface="Calibri" pitchFamily="34" charset="0"/>
+                <a:latin typeface="Amiri" pitchFamily="2" charset="-78"/>
                 <a:ea typeface="Amiri" pitchFamily="2" charset="-78"/>
                 <a:cs typeface="Amiri" pitchFamily="2" charset="-78"/>
               </a:rPr>
@@ -4848,7 +4848,7 @@
                 <a:solidFill>
                   <a:srgbClr val="FFFFFF"/>
                 </a:solidFill>
-                <a:latin typeface="Calibri" pitchFamily="34" charset="0"/>
+                <a:latin typeface="Amiri" pitchFamily="2" charset="-78"/>
                 <a:ea typeface="Amiri" pitchFamily="2" charset="-78"/>
                 <a:cs typeface="Amiri" pitchFamily="2" charset="-78"/>
               </a:rPr>
@@ -4914,7 +4914,7 @@
                 <a:solidFill>
                   <a:srgbClr val="FFFFFF"/>
                 </a:solidFill>
-                <a:latin typeface="Calibri" pitchFamily="34" charset="0"/>
+                <a:latin typeface="Amiri" pitchFamily="2" charset="-78"/>
                 <a:ea typeface="Amiri" pitchFamily="2" charset="-78"/>
                 <a:cs typeface="Amiri" pitchFamily="2" charset="-78"/>
               </a:rPr>
@@ -4980,7 +4980,7 @@
                 <a:solidFill>
                   <a:srgbClr val="FFFFFF"/>
                 </a:solidFill>
-                <a:latin typeface="Calibri" pitchFamily="34" charset="0"/>
+                <a:latin typeface="Amiri" pitchFamily="2" charset="-78"/>
                 <a:ea typeface="Amiri" pitchFamily="2" charset="-78"/>
                 <a:cs typeface="Amiri" pitchFamily="2" charset="-78"/>
               </a:rPr>
@@ -5046,7 +5046,7 @@
                 <a:solidFill>
                   <a:srgbClr val="FFFFFF"/>
                 </a:solidFill>
-                <a:latin typeface="Calibri" pitchFamily="34" charset="0"/>
+                <a:latin typeface="Amiri" pitchFamily="2" charset="-78"/>
                 <a:ea typeface="Amiri" pitchFamily="2" charset="-78"/>
                 <a:cs typeface="Amiri" pitchFamily="2" charset="-78"/>
               </a:rPr>
@@ -8606,7 +8606,7 @@
                 <a:solidFill>
                   <a:srgbClr val="FFFFFF"/>
                 </a:solidFill>
-                <a:latin typeface="Calibri" pitchFamily="34" charset="0"/>
+                <a:latin typeface="Amiri" pitchFamily="2" charset="-78"/>
                 <a:ea typeface="Amiri" pitchFamily="2" charset="-78"/>
                 <a:cs typeface="Amiri" pitchFamily="2" charset="-78"/>
               </a:rPr>
@@ -8672,7 +8672,7 @@
                 <a:solidFill>
                   <a:srgbClr val="FFFFFF"/>
                 </a:solidFill>
-                <a:latin typeface="Calibri" pitchFamily="34" charset="0"/>
+                <a:latin typeface="Amiri" pitchFamily="2" charset="-78"/>
                 <a:ea typeface="Amiri" pitchFamily="2" charset="-78"/>
                 <a:cs typeface="Amiri" pitchFamily="2" charset="-78"/>
               </a:rPr>
@@ -8738,7 +8738,7 @@
                 <a:solidFill>
                   <a:srgbClr val="FFFFFF"/>
                 </a:solidFill>
-                <a:latin typeface="Calibri" pitchFamily="34" charset="0"/>
+                <a:latin typeface="Amiri" pitchFamily="2" charset="-78"/>
                 <a:ea typeface="Amiri" pitchFamily="2" charset="-78"/>
                 <a:cs typeface="Amiri" pitchFamily="2" charset="-78"/>
               </a:rPr>
@@ -8804,7 +8804,7 @@
                 <a:solidFill>
                   <a:srgbClr val="FFFFFF"/>
                 </a:solidFill>
-                <a:latin typeface="Calibri" pitchFamily="34" charset="0"/>
+                <a:latin typeface="Amiri" pitchFamily="2" charset="-78"/>
                 <a:ea typeface="Amiri" pitchFamily="2" charset="-78"/>
                 <a:cs typeface="Amiri" pitchFamily="2" charset="-78"/>
               </a:rPr>
@@ -9591,7 +9591,7 @@
                 <a:solidFill>
                   <a:srgbClr val="FFFFFF"/>
                 </a:solidFill>
-                <a:latin typeface="Calibri" pitchFamily="34" charset="0"/>
+                <a:latin typeface="Amiri" pitchFamily="2" charset="-78"/>
                 <a:ea typeface="Amiri" pitchFamily="2" charset="-78"/>
                 <a:cs typeface="Amiri" pitchFamily="2" charset="-78"/>
               </a:rPr>
@@ -9657,7 +9657,7 @@
                 <a:solidFill>
                   <a:srgbClr val="FFFFFF"/>
                 </a:solidFill>
-                <a:latin typeface="Calibri" pitchFamily="34" charset="0"/>
+                <a:latin typeface="Amiri" pitchFamily="2" charset="-78"/>
                 <a:ea typeface="Amiri" pitchFamily="2" charset="-78"/>
                 <a:cs typeface="Amiri" pitchFamily="2" charset="-78"/>
               </a:rPr>
@@ -9723,7 +9723,7 @@
                 <a:solidFill>
                   <a:srgbClr val="FFFFFF"/>
                 </a:solidFill>
-                <a:latin typeface="Calibri" pitchFamily="34" charset="0"/>
+                <a:latin typeface="Amiri" pitchFamily="2" charset="-78"/>
                 <a:ea typeface="Amiri" pitchFamily="2" charset="-78"/>
                 <a:cs typeface="Amiri" pitchFamily="2" charset="-78"/>
               </a:rPr>
@@ -9789,7 +9789,7 @@
                 <a:solidFill>
                   <a:srgbClr val="FFFFFF"/>
                 </a:solidFill>
-                <a:latin typeface="Calibri" pitchFamily="34" charset="0"/>
+                <a:latin typeface="Amiri" pitchFamily="2" charset="-78"/>
                 <a:ea typeface="Amiri" pitchFamily="2" charset="-78"/>
                 <a:cs typeface="Amiri" pitchFamily="2" charset="-78"/>
               </a:rPr>
@@ -10576,7 +10576,7 @@
                 <a:solidFill>
                   <a:srgbClr val="FFFFFF"/>
                 </a:solidFill>
-                <a:latin typeface="Calibri" pitchFamily="34" charset="0"/>
+                <a:latin typeface="Amiri" pitchFamily="2" charset="-78"/>
                 <a:ea typeface="Amiri" pitchFamily="2" charset="-78"/>
                 <a:cs typeface="Amiri" pitchFamily="2" charset="-78"/>
               </a:rPr>
@@ -10642,7 +10642,7 @@
                 <a:solidFill>
                   <a:srgbClr val="FFFFFF"/>
                 </a:solidFill>
-                <a:latin typeface="Calibri" pitchFamily="34" charset="0"/>
+                <a:latin typeface="Amiri" pitchFamily="2" charset="-78"/>
                 <a:ea typeface="Amiri" pitchFamily="2" charset="-78"/>
                 <a:cs typeface="Amiri" pitchFamily="2" charset="-78"/>
               </a:rPr>
@@ -10708,7 +10708,7 @@
                 <a:solidFill>
                   <a:srgbClr val="FFFFFF"/>
                 </a:solidFill>
-                <a:latin typeface="Calibri" pitchFamily="34" charset="0"/>
+                <a:latin typeface="Amiri" pitchFamily="2" charset="-78"/>
                 <a:ea typeface="Amiri" pitchFamily="2" charset="-78"/>
                 <a:cs typeface="Amiri" pitchFamily="2" charset="-78"/>
               </a:rPr>
@@ -10774,7 +10774,7 @@
                 <a:solidFill>
                   <a:srgbClr val="FFFFFF"/>
                 </a:solidFill>
-                <a:latin typeface="Calibri" pitchFamily="34" charset="0"/>
+                <a:latin typeface="Amiri" pitchFamily="2" charset="-78"/>
                 <a:ea typeface="Amiri" pitchFamily="2" charset="-78"/>
                 <a:cs typeface="Amiri" pitchFamily="2" charset="-78"/>
               </a:rPr>
